--- a/ppt/RAG06-Frameworks.pptx
+++ b/ppt/RAG06-Frameworks.pptx
@@ -4154,6 +4154,13 @@
             <a:r>
               <a:rPr lang="fr-FR" sz="2400" dirty="0"/>
               <a:t> de LLM</a:t>
+            </a:r>
+          </a:p>
+          <a:p>
+            <a:pPr lvl="1"/>
+            <a:r>
+              <a:rPr lang="fr-FR" sz="2000" dirty="0"/>
+              <a:t>Les Tools Chain</a:t>
             </a:r>
           </a:p>
           <a:p>

--- a/ppt/RAG06-Frameworks.pptx
+++ b/ppt/RAG06-Frameworks.pptx
@@ -3675,7 +3675,7 @@
         </p:nvSpPr>
         <p:spPr>
           <a:xfrm>
-            <a:off x="1115616" y="5661248"/>
+            <a:off x="1259632" y="5572223"/>
             <a:ext cx="6400800" cy="551554"/>
           </a:xfrm>
         </p:spPr>
@@ -3731,10 +3731,9 @@
           <a:p>
             <a:pPr algn="ctr"/>
             <a:r>
-              <a:rPr lang="fr-FR" sz="3600" dirty="0" err="1"/>
-              <a:t>Embedding</a:t>
-            </a:r>
-            <a:endParaRPr lang="fr-FR" sz="3600" dirty="0"/>
+              <a:rPr lang="fr-FR" sz="3600" dirty="0"/>
+              <a:t>RAG</a:t>
+            </a:r>
           </a:p>
         </p:txBody>
       </p:sp>
@@ -4153,7 +4152,7 @@
             </a:r>
             <a:r>
               <a:rPr lang="fr-FR" sz="2400" dirty="0"/>
-              <a:t> de LLM</a:t>
+              <a:t> de LLM et de Chainage</a:t>
             </a:r>
           </a:p>
           <a:p>
@@ -4228,6 +4227,17 @@
               <a:rPr lang="fr-FR" sz="2000" dirty="0"/>
               <a:t>Permettent d'avoir une meilleure gestion du stockage des vecteurs</a:t>
             </a:r>
+          </a:p>
+          <a:p>
+            <a:r>
+              <a:rPr lang="fr-FR" sz="2400" dirty="0"/>
+              <a:t>Tout peut être fait sans </a:t>
+            </a:r>
+            <a:r>
+              <a:rPr lang="fr-FR" sz="2400"/>
+              <a:t>framework</a:t>
+            </a:r>
+            <a:endParaRPr lang="fr-FR" sz="2400" dirty="0"/>
           </a:p>
         </p:txBody>
       </p:sp>
@@ -4684,8 +4694,13 @@
           <a:p>
             <a:r>
               <a:rPr lang="fr-FR" dirty="0"/>
-              <a:t>Document</a:t>
-            </a:r>
+              <a:t>Exemple de </a:t>
+            </a:r>
+            <a:r>
+              <a:rPr lang="fr-FR" dirty="0" err="1"/>
+              <a:t>LlamaIndex</a:t>
+            </a:r>
+            <a:endParaRPr lang="fr-FR" dirty="0"/>
           </a:p>
         </p:txBody>
       </p:sp>
@@ -4709,6 +4724,12 @@
         <p:txBody>
           <a:bodyPr/>
           <a:lstStyle/>
+          <a:p>
+            <a:r>
+              <a:rPr lang="fr-FR"/>
+              <a:t>Document</a:t>
+            </a:r>
+          </a:p>
           <a:p>
             <a:r>
               <a:rPr lang="fr-FR" dirty="0"/>

--- a/ppt/RAG06-Frameworks.pptx
+++ b/ppt/RAG06-Frameworks.pptx
@@ -4340,18 +4340,6 @@
               <a:t>Permet d'automatiser un workflow RAG</a:t>
             </a:r>
           </a:p>
-          <a:p>
-            <a:r>
-              <a:rPr lang="fr-FR" dirty="0"/>
-              <a:t>Compatible Cloud</a:t>
-            </a:r>
-          </a:p>
-          <a:p>
-            <a:r>
-              <a:rPr lang="fr-FR" dirty="0"/>
-              <a:t>Nécessite une clé en mode SaaS</a:t>
-            </a:r>
-          </a:p>
         </p:txBody>
       </p:sp>
       <p:pic>
@@ -4585,7 +4573,7 @@
           <a:p>
             <a:r>
               <a:rPr lang="fr-FR" dirty="0"/>
-              <a:t>Complètement libre</a:t>
+              <a:t>Libre</a:t>
             </a:r>
           </a:p>
           <a:p>
@@ -4596,15 +4584,10 @@
           </a:p>
           <a:p>
             <a:r>
-              <a:rPr lang="fr-FR" dirty="0"/>
-              <a:t>Très utilisé</a:t>
-            </a:r>
-          </a:p>
-          <a:p>
-            <a:r>
-              <a:rPr lang="fr-FR" dirty="0"/>
+              <a:rPr lang="fr-FR"/>
               <a:t>RAG</a:t>
             </a:r>
+            <a:endParaRPr lang="fr-FR" dirty="0"/>
           </a:p>
           <a:p>
             <a:endParaRPr lang="fr-FR" dirty="0"/>
